--- a/equiprent-enterprise/excel/Proposal EquipRent Enterprise.pptx
+++ b/equiprent-enterprise/excel/Proposal EquipRent Enterprise.pptx
@@ -2407,7 +2407,78 @@
         <p:spPr>
           <a:xfrm>
             <a:off x="812800" y="5778500"/>
-            <a:ext cx="2734733" cy="292100"/>
+            <a:ext cx="2734733" cy="511166"/>
+          </a:xfrm>
+          <a:prstGeom prst="rect">
+            <a:avLst/>
+          </a:prstGeom>
+          <a:noFill/>
+          <a:ln/>
+        </p:spPr>
+        <p:txBody>
+          <a:bodyPr wrap="square" lIns="0" tIns="0" rIns="0" bIns="0" rtlCol="0" anchor="t">
+            <a:spAutoFit/>
+          </a:bodyPr>
+          <a:lstStyle/>
+          <a:p>
+            <a:pPr marL="0" indent="0" algn="l">
+              <a:lnSpc>
+                <a:spcPts val="2100"/>
+              </a:lnSpc>
+              <a:buNone/>
+            </a:pPr>
+            <a:r>
+              <a:rPr lang="en-US" sz="1500" b="1">
+                <a:solidFill>
+                  <a:srgbClr val="F5F7FB"/>
+                </a:solidFill>
+                <a:latin typeface="Inter" pitchFamily="34" charset="0"/>
+                <a:ea typeface="Inter" pitchFamily="34" charset="-122"/>
+                <a:cs typeface="Inter" pitchFamily="34" charset="-120"/>
+              </a:rPr>
+              <a:t>PT Tiang Karunia Nusantara</a:t>
+            </a:r>
+            <a:endParaRPr lang="en-US" sz="1300">
+              <a:solidFill>
+                <a:srgbClr val="F5F7FB"/>
+              </a:solidFill>
+              <a:latin typeface="Inter" pitchFamily="34" charset="0"/>
+              <a:ea typeface="Inter" pitchFamily="34" charset="-122"/>
+              <a:cs typeface="Inter" pitchFamily="34" charset="-120"/>
+            </a:endParaRPr>
+          </a:p>
+          <a:p>
+            <a:pPr marL="0" indent="0" algn="l">
+              <a:lnSpc>
+                <a:spcPts val="2100"/>
+              </a:lnSpc>
+              <a:buNone/>
+            </a:pPr>
+            <a:r>
+              <a:rPr lang="en-US" sz="1300">
+                <a:solidFill>
+                  <a:srgbClr val="F5F7FB"/>
+                </a:solidFill>
+                <a:latin typeface="Inter" pitchFamily="34" charset="0"/>
+                <a:ea typeface="Inter" pitchFamily="34" charset="-122"/>
+                <a:cs typeface="Inter" pitchFamily="34" charset="-120"/>
+              </a:rPr>
+              <a:t>u.p. Raindi Andreas, Direktur</a:t>
+            </a:r>
+            <a:endParaRPr lang="en-US" sz="1300" dirty="0"/>
+          </a:p>
+        </p:txBody>
+      </p:sp>
+      <p:sp>
+        <p:nvSpPr>
+          <p:cNvPr id="9" name="Text 7"/>
+          <p:cNvSpPr/>
+          <p:nvPr/>
+        </p:nvSpPr>
+        <p:spPr>
+          <a:xfrm>
+            <a:off x="3547533" y="5514358"/>
+            <a:ext cx="1610342" cy="238742"/>
           </a:xfrm>
           <a:prstGeom prst="rect">
             <a:avLst/>
@@ -2423,35 +2494,35 @@
           <a:p>
             <a:pPr marL="0" indent="0" algn="l">
               <a:lnSpc>
-                <a:spcPts val="2100"/>
+                <a:spcPts val="1680"/>
               </a:lnSpc>
               <a:buNone/>
             </a:pPr>
             <a:r>
-              <a:rPr lang="en-US" sz="1500" b="1" dirty="0">
-                <a:solidFill>
-                  <a:srgbClr val="F5F7FB"/>
+              <a:rPr lang="en-US" sz="1200" dirty="0">
+                <a:solidFill>
+                  <a:srgbClr val="8FB0F5"/>
                 </a:solidFill>
                 <a:latin typeface="Inter" pitchFamily="34" charset="0"/>
                 <a:ea typeface="Inter" pitchFamily="34" charset="-122"/>
                 <a:cs typeface="Inter" pitchFamily="34" charset="-120"/>
               </a:rPr>
-              <a:t>[Nama Perusahaan Klien]</a:t>
-            </a:r>
-            <a:endParaRPr lang="en-US" sz="1500" dirty="0"/>
-          </a:p>
-        </p:txBody>
-      </p:sp>
-      <p:sp>
-        <p:nvSpPr>
-          <p:cNvPr id="9" name="Text 7"/>
-          <p:cNvSpPr/>
-          <p:nvPr/>
-        </p:nvSpPr>
-        <p:spPr>
-          <a:xfrm>
-            <a:off x="3547533" y="5514358"/>
-            <a:ext cx="1610342" cy="238742"/>
+              <a:t>Disusun oleh</a:t>
+            </a:r>
+            <a:endParaRPr lang="en-US" sz="1200" dirty="0"/>
+          </a:p>
+        </p:txBody>
+      </p:sp>
+      <p:sp>
+        <p:nvSpPr>
+          <p:cNvPr id="10" name="Text 8"/>
+          <p:cNvSpPr/>
+          <p:nvPr/>
+        </p:nvSpPr>
+        <p:spPr>
+          <a:xfrm>
+            <a:off x="3547533" y="5778500"/>
+            <a:ext cx="1871451" cy="292100"/>
           </a:xfrm>
           <a:prstGeom prst="rect">
             <a:avLst/>
@@ -2467,64 +2538,20 @@
           <a:p>
             <a:pPr marL="0" indent="0" algn="l">
               <a:lnSpc>
-                <a:spcPts val="1680"/>
+                <a:spcPts val="2100"/>
               </a:lnSpc>
               <a:buNone/>
             </a:pPr>
             <a:r>
-              <a:rPr lang="en-US" sz="1200" dirty="0">
-                <a:solidFill>
-                  <a:srgbClr val="8FB0F5"/>
+              <a:rPr lang="en-US" sz="1500" b="1">
+                <a:solidFill>
+                  <a:srgbClr val="F5F7FB"/>
                 </a:solidFill>
                 <a:latin typeface="Inter" pitchFamily="34" charset="0"/>
                 <a:ea typeface="Inter" pitchFamily="34" charset="-122"/>
                 <a:cs typeface="Inter" pitchFamily="34" charset="-120"/>
               </a:rPr>
-              <a:t>Disusun oleh</a:t>
-            </a:r>
-            <a:endParaRPr lang="en-US" sz="1200" dirty="0"/>
-          </a:p>
-        </p:txBody>
-      </p:sp>
-      <p:sp>
-        <p:nvSpPr>
-          <p:cNvPr id="10" name="Text 8"/>
-          <p:cNvSpPr/>
-          <p:nvPr/>
-        </p:nvSpPr>
-        <p:spPr>
-          <a:xfrm>
-            <a:off x="3547533" y="5778500"/>
-            <a:ext cx="1871451" cy="292100"/>
-          </a:xfrm>
-          <a:prstGeom prst="rect">
-            <a:avLst/>
-          </a:prstGeom>
-          <a:noFill/>
-          <a:ln/>
-        </p:spPr>
-        <p:txBody>
-          <a:bodyPr wrap="square" lIns="0" tIns="0" rIns="0" bIns="0" rtlCol="0" anchor="t">
-            <a:normAutofit/>
-          </a:bodyPr>
-          <a:lstStyle/>
-          <a:p>
-            <a:pPr marL="0" indent="0" algn="l">
-              <a:lnSpc>
-                <a:spcPts val="2100"/>
-              </a:lnSpc>
-              <a:buNone/>
-            </a:pPr>
-            <a:r>
-              <a:rPr lang="en-US" sz="1500" b="1" dirty="0">
-                <a:solidFill>
-                  <a:srgbClr val="F5F7FB"/>
-                </a:solidFill>
-                <a:latin typeface="Inter" pitchFamily="34" charset="0"/>
-                <a:ea typeface="Inter" pitchFamily="34" charset="-122"/>
-                <a:cs typeface="Inter" pitchFamily="34" charset="-120"/>
-              </a:rPr>
-              <a:t>Tim IT EquipRent</a:t>
+              <a:t>Tim IT Freelance</a:t>
             </a:r>
             <a:endParaRPr lang="en-US" sz="1500" dirty="0"/>
           </a:p>
@@ -2705,7 +2732,7 @@
               <a:buNone/>
             </a:pPr>
             <a:r>
-              <a:rPr lang="en-US" sz="3200" b="1" i="0" dirty="0">
+              <a:rPr lang="en-US" sz="3200" b="1" i="0">
                 <a:solidFill>
                   <a:srgbClr val="16233F"/>
                 </a:solidFill>
@@ -2713,7 +2740,7 @@
                 <a:ea typeface="Plus Jakarta Sans" pitchFamily="34" charset="-122"/>
                 <a:cs typeface="Plus Jakarta Sans" pitchFamily="34" charset="-120"/>
               </a:rPr>
-              <a:t>Go-live di bulan ke-5, didampingi sampai bulan ke-9</a:t>
+              <a:t>5 bulan: 1 bulan pengerjaan, 4 bulan testing &amp; maintenance</a:t>
             </a:r>
             <a:endParaRPr lang="en-US" sz="3200" dirty="0"/>
           </a:p>
@@ -2728,7 +2755,7 @@
           <p:nvPr>
             <p:extLst>
               <p:ext uri="{D42A27DB-BD31-4B8C-83A1-F6EECF244321}">
-                <p14:modId xmlns:p14="http://schemas.microsoft.com/office/powerpoint/2010/main" val="3371280258"/>
+                <p14:modId xmlns:p14="http://schemas.microsoft.com/office/powerpoint/2010/main" val="2469854140"/>
               </p:ext>
             </p:extLst>
           </p:nvPr>
@@ -3075,7 +3102,7 @@
                         <a:buNone/>
                       </a:pPr>
                       <a:r>
-                        <a:rPr lang="en-US" sz="1300" dirty="0">
+                        <a:rPr lang="en-US" sz="1300">
                           <a:solidFill>
                             <a:srgbClr val="16233F"/>
                           </a:solidFill>
@@ -3083,7 +3110,7 @@
                           <a:ea typeface="Inter" pitchFamily="34" charset="-122"/>
                           <a:cs typeface="Inter" pitchFamily="34" charset="-120"/>
                         </a:rPr>
-                        <a:t>1. Analisis &amp; desain final</a:t>
+                        <a:t>1. Pengerjaan sistem</a:t>
                       </a:r>
                       <a:endParaRPr lang="en-US" sz="1300" dirty="0">
                         <a:latin typeface="Inter" charset="0"/>
@@ -3143,7 +3170,7 @@
                         <a:buNone/>
                       </a:pPr>
                       <a:r>
-                        <a:rPr lang="en-US" sz="1300" dirty="0">
+                        <a:rPr lang="en-US" sz="1300">
                           <a:solidFill>
                             <a:srgbClr val="16233F"/>
                           </a:solidFill>
@@ -3211,7 +3238,7 @@
                         <a:buNone/>
                       </a:pPr>
                       <a:r>
-                        <a:rPr lang="en-US" sz="1300" dirty="0">
+                        <a:rPr lang="en-US" sz="1300">
                           <a:solidFill>
                             <a:srgbClr val="16233F"/>
                           </a:solidFill>
@@ -3219,7 +3246,7 @@
                           <a:ea typeface="Inter" pitchFamily="34" charset="-122"/>
                           <a:cs typeface="Inter" pitchFamily="34" charset="-120"/>
                         </a:rPr>
-                        <a:t>Review prototype bersama, finalisasi alur &amp; data</a:t>
+                        <a:t>Finalisasi alur dari prototype, pembuatan semua modul, setup server</a:t>
                       </a:r>
                       <a:endParaRPr lang="en-US" sz="1300" dirty="0">
                         <a:latin typeface="Inter" charset="0"/>
@@ -3279,7 +3306,7 @@
                         <a:buNone/>
                       </a:pPr>
                       <a:r>
-                        <a:rPr lang="en-US" sz="1300" dirty="0">
+                        <a:rPr lang="en-US" sz="1300">
                           <a:solidFill>
                             <a:srgbClr val="16233F"/>
                           </a:solidFill>
@@ -3287,7 +3314,7 @@
                           <a:ea typeface="Inter" pitchFamily="34" charset="-122"/>
                           <a:cs typeface="Inter" pitchFamily="34" charset="-120"/>
                         </a:rPr>
-                        <a:t>Desain disetujui</a:t>
+                        <a:t>Sistem siap diuji</a:t>
                       </a:r>
                       <a:endParaRPr lang="en-US" sz="1300" dirty="0">
                         <a:latin typeface="Inter" charset="0"/>
@@ -3354,7 +3381,7 @@
                         <a:buNone/>
                       </a:pPr>
                       <a:r>
-                        <a:rPr lang="en-US" sz="1300" dirty="0">
+                        <a:rPr lang="en-US" sz="1300">
                           <a:solidFill>
                             <a:srgbClr val="16233F"/>
                           </a:solidFill>
@@ -3362,7 +3389,7 @@
                           <a:ea typeface="Inter" pitchFamily="34" charset="-122"/>
                           <a:cs typeface="Inter" pitchFamily="34" charset="-120"/>
                         </a:rPr>
-                        <a:t>2. Modul operasional</a:t>
+                        <a:t>2. Testing (UAT) &amp; go-live</a:t>
                       </a:r>
                       <a:endParaRPr lang="en-US" sz="1300" dirty="0">
                         <a:latin typeface="Inter" charset="0"/>
@@ -3375,77 +3402,6 @@
                     <a:lnL w="12700" cap="flat" cmpd="sng" algn="ctr">
                       <a:solidFill>
                         <a:srgbClr val="C4C5C8"/>
-                      </a:solidFill>
-                      <a:prstDash val="solid"/>
-                      <a:round/>
-                      <a:headEnd type="none" w="med" len="med"/>
-                      <a:tailEnd type="none" w="med" len="med"/>
-                    </a:lnL>
-                    <a:lnR w="12700" cap="flat" cmpd="sng" algn="ctr">
-                      <a:solidFill>
-                        <a:srgbClr val="BDC1C9"/>
-                      </a:solidFill>
-                      <a:prstDash val="solid"/>
-                      <a:round/>
-                      <a:headEnd type="none" w="med" len="med"/>
-                      <a:tailEnd type="none" w="med" len="med"/>
-                    </a:lnR>
-                    <a:lnT w="12700" cap="flat" cmpd="sng" algn="ctr">
-                      <a:solidFill>
-                        <a:srgbClr val="C4C5C8"/>
-                      </a:solidFill>
-                      <a:prstDash val="solid"/>
-                      <a:round/>
-                      <a:headEnd type="none" w="med" len="med"/>
-                      <a:tailEnd type="none" w="med" len="med"/>
-                    </a:lnT>
-                    <a:lnB w="12700" cap="flat" cmpd="sng" algn="ctr">
-                      <a:solidFill>
-                        <a:srgbClr val="BDC1C9"/>
-                      </a:solidFill>
-                      <a:prstDash val="solid"/>
-                      <a:round/>
-                      <a:headEnd type="none" w="med" len="med"/>
-                      <a:tailEnd type="none" w="med" len="med"/>
-                    </a:lnB>
-                    <a:solidFill>
-                      <a:srgbClr val="EDF2FC"/>
-                    </a:solidFill>
-                  </a:tcPr>
-                </a:tc>
-                <a:tc>
-                  <a:txBody>
-                    <a:bodyPr/>
-                    <a:lstStyle/>
-                    <a:p>
-                      <a:pPr marL="0" indent="0">
-                        <a:lnSpc>
-                          <a:spcPts val="1820"/>
-                        </a:lnSpc>
-                        <a:buNone/>
-                      </a:pPr>
-                      <a:r>
-                        <a:rPr lang="en-US" sz="1300" dirty="0">
-                          <a:solidFill>
-                            <a:srgbClr val="16233F"/>
-                          </a:solidFill>
-                          <a:latin typeface="Inter" pitchFamily="34" charset="0"/>
-                          <a:ea typeface="Inter" pitchFamily="34" charset="-122"/>
-                          <a:cs typeface="Inter" pitchFamily="34" charset="-120"/>
-                        </a:rPr>
-                        <a:t>Bulan 2–3</a:t>
-                      </a:r>
-                      <a:endParaRPr lang="en-US" sz="1300" dirty="0">
-                        <a:latin typeface="Inter" charset="0"/>
-                        <a:ea typeface="Inter" charset="0"/>
-                        <a:cs typeface="Inter" charset="0"/>
-                      </a:endParaRPr>
-                    </a:p>
-                  </a:txBody>
-                  <a:tcPr marL="57785" marR="57785" marT="57785" marB="57785">
-                    <a:lnL w="12700" cap="flat" cmpd="sng" algn="ctr">
-                      <a:solidFill>
-                        <a:srgbClr val="BDC1C9"/>
                       </a:solidFill>
                       <a:prstDash val="solid"/>
                       <a:round/>
@@ -3504,7 +3460,7 @@
                           <a:ea typeface="Inter" pitchFamily="34" charset="-122"/>
                           <a:cs typeface="Inter" pitchFamily="34" charset="-120"/>
                         </a:rPr>
-                        <a:t>Pelanggan, order sewa &amp; jual, tagihan, logistik, stok</a:t>
+                        <a:t>Bulan 2</a:t>
                       </a:r>
                       <a:endParaRPr lang="en-US" sz="1300" dirty="0">
                         <a:latin typeface="Inter" charset="0"/>
@@ -3567,7 +3523,7 @@
                         <a:buNone/>
                       </a:pPr>
                       <a:r>
-                        <a:rPr lang="en-US" sz="1300" dirty="0">
+                        <a:rPr lang="it-IT" sz="1300">
                           <a:solidFill>
                             <a:srgbClr val="16233F"/>
                           </a:solidFill>
@@ -3575,7 +3531,78 @@
                           <a:ea typeface="Inter" pitchFamily="34" charset="-122"/>
                           <a:cs typeface="Inter" pitchFamily="34" charset="-120"/>
                         </a:rPr>
-                        <a:t>UAT tahap 1</a:t>
+                        <a:t>Uji coba bersama tim klien, migrasi data, pelatihan per peran</a:t>
+                      </a:r>
+                      <a:endParaRPr lang="en-US" sz="1300" dirty="0">
+                        <a:latin typeface="Inter" charset="0"/>
+                        <a:ea typeface="Inter" charset="0"/>
+                        <a:cs typeface="Inter" charset="0"/>
+                      </a:endParaRPr>
+                    </a:p>
+                  </a:txBody>
+                  <a:tcPr marL="57785" marR="57785" marT="57785" marB="57785">
+                    <a:lnL w="12700" cap="flat" cmpd="sng" algn="ctr">
+                      <a:solidFill>
+                        <a:srgbClr val="BDC1C9"/>
+                      </a:solidFill>
+                      <a:prstDash val="solid"/>
+                      <a:round/>
+                      <a:headEnd type="none" w="med" len="med"/>
+                      <a:tailEnd type="none" w="med" len="med"/>
+                    </a:lnL>
+                    <a:lnR w="12700" cap="flat" cmpd="sng" algn="ctr">
+                      <a:solidFill>
+                        <a:srgbClr val="BDC1C9"/>
+                      </a:solidFill>
+                      <a:prstDash val="solid"/>
+                      <a:round/>
+                      <a:headEnd type="none" w="med" len="med"/>
+                      <a:tailEnd type="none" w="med" len="med"/>
+                    </a:lnR>
+                    <a:lnT w="12700" cap="flat" cmpd="sng" algn="ctr">
+                      <a:solidFill>
+                        <a:srgbClr val="C4C5C8"/>
+                      </a:solidFill>
+                      <a:prstDash val="solid"/>
+                      <a:round/>
+                      <a:headEnd type="none" w="med" len="med"/>
+                      <a:tailEnd type="none" w="med" len="med"/>
+                    </a:lnT>
+                    <a:lnB w="12700" cap="flat" cmpd="sng" algn="ctr">
+                      <a:solidFill>
+                        <a:srgbClr val="BDC1C9"/>
+                      </a:solidFill>
+                      <a:prstDash val="solid"/>
+                      <a:round/>
+                      <a:headEnd type="none" w="med" len="med"/>
+                      <a:tailEnd type="none" w="med" len="med"/>
+                    </a:lnB>
+                    <a:solidFill>
+                      <a:srgbClr val="EDF2FC"/>
+                    </a:solidFill>
+                  </a:tcPr>
+                </a:tc>
+                <a:tc>
+                  <a:txBody>
+                    <a:bodyPr/>
+                    <a:lstStyle/>
+                    <a:p>
+                      <a:pPr marL="0" indent="0">
+                        <a:lnSpc>
+                          <a:spcPts val="1820"/>
+                        </a:lnSpc>
+                        <a:buNone/>
+                      </a:pPr>
+                      <a:r>
+                        <a:rPr lang="en-US" sz="1300">
+                          <a:solidFill>
+                            <a:srgbClr val="16233F"/>
+                          </a:solidFill>
+                          <a:latin typeface="Inter" pitchFamily="34" charset="0"/>
+                          <a:ea typeface="Inter" pitchFamily="34" charset="-122"/>
+                          <a:cs typeface="Inter" pitchFamily="34" charset="-120"/>
+                        </a:rPr>
+                        <a:t>Sistem berjalan</a:t>
                       </a:r>
                       <a:endParaRPr lang="en-US" sz="1300" dirty="0">
                         <a:latin typeface="Inter" charset="0"/>
@@ -3645,7 +3672,7 @@
                         <a:buNone/>
                       </a:pPr>
                       <a:r>
-                        <a:rPr lang="en-US" sz="1300" dirty="0">
+                        <a:rPr lang="en-US" sz="1300">
                           <a:solidFill>
                             <a:srgbClr val="16233F"/>
                           </a:solidFill>
@@ -3653,7 +3680,7 @@
                           <a:ea typeface="Inter" pitchFamily="34" charset="-122"/>
                           <a:cs typeface="Inter" pitchFamily="34" charset="-120"/>
                         </a:rPr>
-                        <a:t>3. Modul keuangan</a:t>
+                        <a:t>3. Testing lanjutan</a:t>
                       </a:r>
                       <a:endParaRPr lang="en-US" sz="1300" dirty="0">
                         <a:latin typeface="Inter" charset="0"/>
@@ -3713,7 +3740,7 @@
                         <a:buNone/>
                       </a:pPr>
                       <a:r>
-                        <a:rPr lang="en-US" sz="1300" dirty="0">
+                        <a:rPr lang="en-US" sz="1300">
                           <a:solidFill>
                             <a:srgbClr val="16233F"/>
                           </a:solidFill>
@@ -3721,7 +3748,7 @@
                           <a:ea typeface="Inter" pitchFamily="34" charset="-122"/>
                           <a:cs typeface="Inter" pitchFamily="34" charset="-120"/>
                         </a:rPr>
-                        <a:t>Bulan 4</a:t>
+                        <a:t>Bulan 3</a:t>
                       </a:r>
                       <a:endParaRPr lang="en-US" sz="1300" dirty="0">
                         <a:latin typeface="Inter" charset="0"/>
@@ -3781,7 +3808,7 @@
                         <a:buNone/>
                       </a:pPr>
                       <a:r>
-                        <a:rPr lang="en-US" sz="1300" dirty="0">
+                        <a:rPr lang="fi-FI" sz="1300">
                           <a:solidFill>
                             <a:srgbClr val="16233F"/>
                           </a:solidFill>
@@ -3789,7 +3816,7 @@
                           <a:ea typeface="Inter" pitchFamily="34" charset="-122"/>
                           <a:cs typeface="Inter" pitchFamily="34" charset="-120"/>
                         </a:rPr>
-                        <a:t>Pembelian, kas &amp; bank, akuntansi, pajak</a:t>
+                        <a:t>Uji pemakaian harian, perbaikan temuan, penyesuaian kecil</a:t>
                       </a:r>
                       <a:endParaRPr lang="en-US" sz="1300" dirty="0">
                         <a:latin typeface="Inter" charset="0"/>
@@ -3849,7 +3876,7 @@
                         <a:buNone/>
                       </a:pPr>
                       <a:r>
-                        <a:rPr lang="en-US" sz="1300" dirty="0">
+                        <a:rPr lang="en-US" sz="1300">
                           <a:solidFill>
                             <a:srgbClr val="16233F"/>
                           </a:solidFill>
@@ -3857,7 +3884,7 @@
                           <a:ea typeface="Inter" pitchFamily="34" charset="-122"/>
                           <a:cs typeface="Inter" pitchFamily="34" charset="-120"/>
                         </a:rPr>
-                        <a:t>UAT tahap 2</a:t>
+                        <a:t>Alur sesuai operasional</a:t>
                       </a:r>
                       <a:endParaRPr lang="en-US" sz="1300" dirty="0">
                         <a:latin typeface="Inter" charset="0"/>
@@ -3924,7 +3951,7 @@
                         <a:buNone/>
                       </a:pPr>
                       <a:r>
-                        <a:rPr lang="en-US" sz="1300" dirty="0">
+                        <a:rPr lang="en-US" sz="1300">
                           <a:solidFill>
                             <a:srgbClr val="16233F"/>
                           </a:solidFill>
@@ -3932,7 +3959,7 @@
                           <a:ea typeface="Inter" pitchFamily="34" charset="-122"/>
                           <a:cs typeface="Inter" pitchFamily="34" charset="-120"/>
                         </a:rPr>
-                        <a:t>4. Go-live</a:t>
+                        <a:t>4. Maintenance</a:t>
                       </a:r>
                       <a:endParaRPr lang="en-US" sz="1300" dirty="0">
                         <a:latin typeface="Inter" charset="0"/>
@@ -3995,7 +4022,7 @@
                         <a:buNone/>
                       </a:pPr>
                       <a:r>
-                        <a:rPr lang="en-US" sz="1300" dirty="0">
+                        <a:rPr lang="en-US" sz="1300">
                           <a:solidFill>
                             <a:srgbClr val="16233F"/>
                           </a:solidFill>
@@ -4003,7 +4030,7 @@
                           <a:ea typeface="Inter" pitchFamily="34" charset="-122"/>
                           <a:cs typeface="Inter" pitchFamily="34" charset="-120"/>
                         </a:rPr>
-                        <a:t>Bulan 5</a:t>
+                        <a:t>Bulan 4–5</a:t>
                       </a:r>
                       <a:endParaRPr lang="en-US" sz="1300" dirty="0">
                         <a:latin typeface="Inter" charset="0"/>
@@ -4066,7 +4093,7 @@
                         <a:buNone/>
                       </a:pPr>
                       <a:r>
-                        <a:rPr lang="en-US" sz="1300" dirty="0">
+                        <a:rPr lang="en-US" sz="1300">
                           <a:solidFill>
                             <a:srgbClr val="16233F"/>
                           </a:solidFill>
@@ -4074,7 +4101,7 @@
                           <a:ea typeface="Inter" pitchFamily="34" charset="-122"/>
                           <a:cs typeface="Inter" pitchFamily="34" charset="-120"/>
                         </a:rPr>
-                        <a:t>Migrasi data, pelatihan per peran, mulai dipakai</a:t>
+                        <a:t>Perbaikan bug, backup mingguan, update keamanan, monitoring</a:t>
                       </a:r>
                       <a:endParaRPr lang="en-US" sz="1300" dirty="0">
                         <a:latin typeface="Inter" charset="0"/>
@@ -4137,289 +4164,7 @@
                         <a:buNone/>
                       </a:pPr>
                       <a:r>
-                        <a:rPr lang="en-US" sz="1300" dirty="0">
-                          <a:solidFill>
-                            <a:srgbClr val="16233F"/>
-                          </a:solidFill>
-                          <a:latin typeface="Inter" pitchFamily="34" charset="0"/>
-                          <a:ea typeface="Inter" pitchFamily="34" charset="-122"/>
-                          <a:cs typeface="Inter" pitchFamily="34" charset="-120"/>
-                        </a:rPr>
-                        <a:t>Sistem berjalan</a:t>
-                      </a:r>
-                      <a:endParaRPr lang="en-US" sz="1300" dirty="0">
-                        <a:latin typeface="Inter" charset="0"/>
-                        <a:ea typeface="Inter" charset="0"/>
-                        <a:cs typeface="Inter" charset="0"/>
-                      </a:endParaRPr>
-                    </a:p>
-                  </a:txBody>
-                  <a:tcPr marL="57785" marR="57785" marT="57785" marB="57785">
-                    <a:lnL w="12700" cap="flat" cmpd="sng" algn="ctr">
-                      <a:solidFill>
-                        <a:srgbClr val="BDC1C9"/>
-                      </a:solidFill>
-                      <a:prstDash val="solid"/>
-                      <a:round/>
-                      <a:headEnd type="none" w="med" len="med"/>
-                      <a:tailEnd type="none" w="med" len="med"/>
-                    </a:lnL>
-                    <a:lnR w="12700" cap="flat" cmpd="sng" algn="ctr">
-                      <a:solidFill>
-                        <a:srgbClr val="BDC1C9"/>
-                      </a:solidFill>
-                      <a:prstDash val="solid"/>
-                      <a:round/>
-                      <a:headEnd type="none" w="med" len="med"/>
-                      <a:tailEnd type="none" w="med" len="med"/>
-                    </a:lnR>
-                    <a:lnT w="12700" cap="flat" cmpd="sng" algn="ctr">
-                      <a:solidFill>
-                        <a:srgbClr val="C4C5C8"/>
-                      </a:solidFill>
-                      <a:prstDash val="solid"/>
-                      <a:round/>
-                      <a:headEnd type="none" w="med" len="med"/>
-                      <a:tailEnd type="none" w="med" len="med"/>
-                    </a:lnT>
-                    <a:lnB w="12700" cap="flat" cmpd="sng" algn="ctr">
-                      <a:solidFill>
-                        <a:srgbClr val="BDC1C9"/>
-                      </a:solidFill>
-                      <a:prstDash val="solid"/>
-                      <a:round/>
-                      <a:headEnd type="none" w="med" len="med"/>
-                      <a:tailEnd type="none" w="med" len="med"/>
-                    </a:lnB>
-                    <a:solidFill>
-                      <a:srgbClr val="EDF2FC"/>
-                    </a:solidFill>
-                  </a:tcPr>
-                </a:tc>
-                <a:extLst>
-                  <a:ext uri="{0D108BD9-81ED-4DB2-BD59-A6C34878D82A}">
-                    <a16:rowId xmlns:a16="http://schemas.microsoft.com/office/drawing/2014/main" val="10004"/>
-                  </a:ext>
-                </a:extLst>
-              </a:tr>
-              <a:tr h="588963">
-                <a:tc>
-                  <a:txBody>
-                    <a:bodyPr/>
-                    <a:lstStyle/>
-                    <a:p>
-                      <a:pPr marL="0" indent="0">
-                        <a:lnSpc>
-                          <a:spcPts val="1820"/>
-                        </a:lnSpc>
-                        <a:buNone/>
-                      </a:pPr>
-                      <a:r>
-                        <a:rPr lang="en-US" sz="1300" dirty="0">
-                          <a:solidFill>
-                            <a:srgbClr val="16233F"/>
-                          </a:solidFill>
-                          <a:latin typeface="Inter" pitchFamily="34" charset="0"/>
-                          <a:ea typeface="Inter" pitchFamily="34" charset="-122"/>
-                          <a:cs typeface="Inter" pitchFamily="34" charset="-120"/>
-                        </a:rPr>
-                        <a:t>5. Pendampingan</a:t>
-                      </a:r>
-                      <a:endParaRPr lang="en-US" sz="1300" dirty="0">
-                        <a:latin typeface="Inter" charset="0"/>
-                        <a:ea typeface="Inter" charset="0"/>
-                        <a:cs typeface="Inter" charset="0"/>
-                      </a:endParaRPr>
-                    </a:p>
-                  </a:txBody>
-                  <a:tcPr marL="57785" marR="57785" marT="57785" marB="57785">
-                    <a:lnL w="12700" cap="flat" cmpd="sng" algn="ctr">
-                      <a:solidFill>
-                        <a:srgbClr val="C4C5C8"/>
-                      </a:solidFill>
-                      <a:prstDash val="solid"/>
-                      <a:round/>
-                      <a:headEnd type="none" w="med" len="med"/>
-                      <a:tailEnd type="none" w="med" len="med"/>
-                    </a:lnL>
-                    <a:lnR w="12700" cap="flat" cmpd="sng" algn="ctr">
-                      <a:solidFill>
-                        <a:srgbClr val="C4C5C8"/>
-                      </a:solidFill>
-                      <a:prstDash val="solid"/>
-                      <a:round/>
-                      <a:headEnd type="none" w="med" len="med"/>
-                      <a:tailEnd type="none" w="med" len="med"/>
-                    </a:lnR>
-                    <a:lnT w="12700" cap="flat" cmpd="sng" algn="ctr">
-                      <a:solidFill>
-                        <a:srgbClr val="BDC1C9"/>
-                      </a:solidFill>
-                      <a:prstDash val="solid"/>
-                      <a:round/>
-                      <a:headEnd type="none" w="med" len="med"/>
-                      <a:tailEnd type="none" w="med" len="med"/>
-                    </a:lnT>
-                    <a:lnB w="12700" cap="flat" cmpd="sng" algn="ctr">
-                      <a:solidFill>
-                        <a:srgbClr val="C4C5C8"/>
-                      </a:solidFill>
-                      <a:prstDash val="solid"/>
-                      <a:round/>
-                      <a:headEnd type="none" w="med" len="med"/>
-                      <a:tailEnd type="none" w="med" len="med"/>
-                    </a:lnB>
-                  </a:tcPr>
-                </a:tc>
-                <a:tc>
-                  <a:txBody>
-                    <a:bodyPr/>
-                    <a:lstStyle/>
-                    <a:p>
-                      <a:pPr marL="0" indent="0">
-                        <a:lnSpc>
-                          <a:spcPts val="1820"/>
-                        </a:lnSpc>
-                        <a:buNone/>
-                      </a:pPr>
-                      <a:r>
-                        <a:rPr lang="en-US" sz="1300" dirty="0">
-                          <a:solidFill>
-                            <a:srgbClr val="16233F"/>
-                          </a:solidFill>
-                          <a:latin typeface="Inter" pitchFamily="34" charset="0"/>
-                          <a:ea typeface="Inter" pitchFamily="34" charset="-122"/>
-                          <a:cs typeface="Inter" pitchFamily="34" charset="-120"/>
-                        </a:rPr>
-                        <a:t>Bulan 6–9</a:t>
-                      </a:r>
-                      <a:endParaRPr lang="en-US" sz="1300" dirty="0">
-                        <a:latin typeface="Inter" charset="0"/>
-                        <a:ea typeface="Inter" charset="0"/>
-                        <a:cs typeface="Inter" charset="0"/>
-                      </a:endParaRPr>
-                    </a:p>
-                  </a:txBody>
-                  <a:tcPr marL="57785" marR="57785" marT="57785" marB="57785">
-                    <a:lnL w="12700" cap="flat" cmpd="sng" algn="ctr">
-                      <a:solidFill>
-                        <a:srgbClr val="C4C5C8"/>
-                      </a:solidFill>
-                      <a:prstDash val="solid"/>
-                      <a:round/>
-                      <a:headEnd type="none" w="med" len="med"/>
-                      <a:tailEnd type="none" w="med" len="med"/>
-                    </a:lnL>
-                    <a:lnR w="12700" cap="flat" cmpd="sng" algn="ctr">
-                      <a:solidFill>
-                        <a:srgbClr val="C4C5C8"/>
-                      </a:solidFill>
-                      <a:prstDash val="solid"/>
-                      <a:round/>
-                      <a:headEnd type="none" w="med" len="med"/>
-                      <a:tailEnd type="none" w="med" len="med"/>
-                    </a:lnR>
-                    <a:lnT w="12700" cap="flat" cmpd="sng" algn="ctr">
-                      <a:solidFill>
-                        <a:srgbClr val="BDC1C9"/>
-                      </a:solidFill>
-                      <a:prstDash val="solid"/>
-                      <a:round/>
-                      <a:headEnd type="none" w="med" len="med"/>
-                      <a:tailEnd type="none" w="med" len="med"/>
-                    </a:lnT>
-                    <a:lnB w="12700" cap="flat" cmpd="sng" algn="ctr">
-                      <a:solidFill>
-                        <a:srgbClr val="C4C5C8"/>
-                      </a:solidFill>
-                      <a:prstDash val="solid"/>
-                      <a:round/>
-                      <a:headEnd type="none" w="med" len="med"/>
-                      <a:tailEnd type="none" w="med" len="med"/>
-                    </a:lnB>
-                  </a:tcPr>
-                </a:tc>
-                <a:tc>
-                  <a:txBody>
-                    <a:bodyPr/>
-                    <a:lstStyle/>
-                    <a:p>
-                      <a:pPr marL="0" indent="0">
-                        <a:lnSpc>
-                          <a:spcPts val="1820"/>
-                        </a:lnSpc>
-                        <a:buNone/>
-                      </a:pPr>
-                      <a:r>
-                        <a:rPr lang="en-US" sz="1300" dirty="0">
-                          <a:solidFill>
-                            <a:srgbClr val="16233F"/>
-                          </a:solidFill>
-                          <a:latin typeface="Inter" pitchFamily="34" charset="0"/>
-                          <a:ea typeface="Inter" pitchFamily="34" charset="-122"/>
-                          <a:cs typeface="Inter" pitchFamily="34" charset="-120"/>
-                        </a:rPr>
-                        <a:t>Perbaikan bug, penyesuaian kecil, monitoring</a:t>
-                      </a:r>
-                      <a:endParaRPr lang="en-US" sz="1300" dirty="0">
-                        <a:latin typeface="Inter" charset="0"/>
-                        <a:ea typeface="Inter" charset="0"/>
-                        <a:cs typeface="Inter" charset="0"/>
-                      </a:endParaRPr>
-                    </a:p>
-                  </a:txBody>
-                  <a:tcPr marL="57785" marR="57785" marT="57785" marB="57785">
-                    <a:lnL w="12700" cap="flat" cmpd="sng" algn="ctr">
-                      <a:solidFill>
-                        <a:srgbClr val="C4C5C8"/>
-                      </a:solidFill>
-                      <a:prstDash val="solid"/>
-                      <a:round/>
-                      <a:headEnd type="none" w="med" len="med"/>
-                      <a:tailEnd type="none" w="med" len="med"/>
-                    </a:lnL>
-                    <a:lnR w="12700" cap="flat" cmpd="sng" algn="ctr">
-                      <a:solidFill>
-                        <a:srgbClr val="C4C5C8"/>
-                      </a:solidFill>
-                      <a:prstDash val="solid"/>
-                      <a:round/>
-                      <a:headEnd type="none" w="med" len="med"/>
-                      <a:tailEnd type="none" w="med" len="med"/>
-                    </a:lnR>
-                    <a:lnT w="12700" cap="flat" cmpd="sng" algn="ctr">
-                      <a:solidFill>
-                        <a:srgbClr val="BDC1C9"/>
-                      </a:solidFill>
-                      <a:prstDash val="solid"/>
-                      <a:round/>
-                      <a:headEnd type="none" w="med" len="med"/>
-                      <a:tailEnd type="none" w="med" len="med"/>
-                    </a:lnT>
-                    <a:lnB w="12700" cap="flat" cmpd="sng" algn="ctr">
-                      <a:solidFill>
-                        <a:srgbClr val="C4C5C8"/>
-                      </a:solidFill>
-                      <a:prstDash val="solid"/>
-                      <a:round/>
-                      <a:headEnd type="none" w="med" len="med"/>
-                      <a:tailEnd type="none" w="med" len="med"/>
-                    </a:lnB>
-                  </a:tcPr>
-                </a:tc>
-                <a:tc>
-                  <a:txBody>
-                    <a:bodyPr/>
-                    <a:lstStyle/>
-                    <a:p>
-                      <a:pPr marL="0" indent="0">
-                        <a:lnSpc>
-                          <a:spcPts val="1820"/>
-                        </a:lnSpc>
-                        <a:buNone/>
-                      </a:pPr>
-                      <a:r>
-                        <a:rPr lang="en-US" sz="1300" dirty="0">
+                        <a:rPr lang="en-US" sz="1300">
                           <a:solidFill>
                             <a:srgbClr val="16233F"/>
                           </a:solidFill>
@@ -4439,7 +4184,7 @@
                   <a:tcPr marL="57785" marR="57785" marT="57785" marB="57785">
                     <a:lnL w="12700" cap="flat" cmpd="sng" algn="ctr">
                       <a:solidFill>
-                        <a:srgbClr val="C4C5C8"/>
+                        <a:srgbClr val="BDC1C9"/>
                       </a:solidFill>
                       <a:prstDash val="solid"/>
                       <a:round/>
@@ -4448,7 +4193,7 @@
                     </a:lnL>
                     <a:lnR w="12700" cap="flat" cmpd="sng" algn="ctr">
                       <a:solidFill>
-                        <a:srgbClr val="C4C5C8"/>
+                        <a:srgbClr val="BDC1C9"/>
                       </a:solidFill>
                       <a:prstDash val="solid"/>
                       <a:round/>
@@ -4457,7 +4202,7 @@
                     </a:lnR>
                     <a:lnT w="12700" cap="flat" cmpd="sng" algn="ctr">
                       <a:solidFill>
-                        <a:srgbClr val="BDC1C9"/>
+                        <a:srgbClr val="C4C5C8"/>
                       </a:solidFill>
                       <a:prstDash val="solid"/>
                       <a:round/>
@@ -4466,18 +4211,21 @@
                     </a:lnT>
                     <a:lnB w="12700" cap="flat" cmpd="sng" algn="ctr">
                       <a:solidFill>
-                        <a:srgbClr val="C4C5C8"/>
+                        <a:srgbClr val="BDC1C9"/>
                       </a:solidFill>
                       <a:prstDash val="solid"/>
                       <a:round/>
                       <a:headEnd type="none" w="med" len="med"/>
                       <a:tailEnd type="none" w="med" len="med"/>
                     </a:lnB>
+                    <a:solidFill>
+                      <a:srgbClr val="EDF2FC"/>
+                    </a:solidFill>
                   </a:tcPr>
                 </a:tc>
                 <a:extLst>
                   <a:ext uri="{0D108BD9-81ED-4DB2-BD59-A6C34878D82A}">
-                    <a16:rowId xmlns:a16="http://schemas.microsoft.com/office/drawing/2014/main" val="10005"/>
+                    <a16:rowId xmlns:a16="http://schemas.microsoft.com/office/drawing/2014/main" val="10004"/>
                   </a:ext>
                 </a:extLst>
               </a:tr>
@@ -4845,7 +4593,7 @@
               <a:buNone/>
             </a:pPr>
             <a:r>
-              <a:rPr lang="en-US" sz="1200" dirty="0">
+              <a:rPr lang="en-US" sz="1200">
                 <a:solidFill>
                   <a:srgbClr val="4A5670"/>
                 </a:solidFill>
@@ -4853,7 +4601,7 @@
                 <a:ea typeface="Inter" pitchFamily="34" charset="-122"/>
                 <a:cs typeface="Inter" pitchFamily="34" charset="-120"/>
               </a:rPr>
-              <a:t>Harga belum termasuk PPN [jika ada].</a:t>
+              <a:t>Hosting, maintenance &amp; backup mingguan termasuk selama tahun pertama. Harga belum termasuk PPN [jika ada].</a:t>
             </a:r>
             <a:endParaRPr lang="en-US" sz="1200" dirty="0"/>
           </a:p>
@@ -4868,7 +4616,7 @@
           <p:nvPr>
             <p:extLst>
               <p:ext uri="{D42A27DB-BD31-4B8C-83A1-F6EECF244321}">
-                <p14:modId xmlns:p14="http://schemas.microsoft.com/office/powerpoint/2010/main" val="1919624630"/>
+                <p14:modId xmlns:p14="http://schemas.microsoft.com/office/powerpoint/2010/main" val="277739977"/>
               </p:ext>
             </p:extLst>
           </p:nvPr>
@@ -6382,7 +6130,7 @@
                         <a:buNone/>
                       </a:pPr>
                       <a:r>
-                        <a:rPr lang="en-US" sz="1200" dirty="0">
+                        <a:rPr lang="fi-FI" sz="1200">
                           <a:solidFill>
                             <a:srgbClr val="16233F"/>
                           </a:solidFill>
@@ -6390,7 +6138,7 @@
                           <a:ea typeface="Inter" pitchFamily="34" charset="-122"/>
                           <a:cs typeface="Inter" pitchFamily="34" charset="-120"/>
                         </a:rPr>
-                        <a:t>Server cloud, domain &amp; SSL (1 tahun)</a:t>
+                        <a:t>Hosting, domain &amp; SSL tahun pertama</a:t>
                       </a:r>
                       <a:endParaRPr lang="en-US" sz="1200" dirty="0">
                         <a:latin typeface="Inter" charset="0"/>
@@ -6668,7 +6416,7 @@
                         <a:buNone/>
                       </a:pPr>
                       <a:r>
-                        <a:rPr lang="en-US" sz="1200" dirty="0">
+                        <a:rPr lang="en-US" sz="1200">
                           <a:solidFill>
                             <a:srgbClr val="16233F"/>
                           </a:solidFill>
@@ -6676,7 +6424,7 @@
                           <a:ea typeface="Inter" pitchFamily="34" charset="-122"/>
                           <a:cs typeface="Inter" pitchFamily="34" charset="-120"/>
                         </a:rPr>
-                        <a:t>Pendampingan &amp; maintenance 4 bulan</a:t>
+                        <a:t>Testing &amp; maintenance 4 bulan</a:t>
                       </a:r>
                       <a:endParaRPr lang="en-US" sz="1200" dirty="0">
                         <a:latin typeface="Inter" charset="0"/>
@@ -7428,7 +7176,7 @@
               <a:buNone/>
             </a:pPr>
             <a:r>
-              <a:rPr lang="en-US" sz="1300" dirty="0">
+              <a:rPr lang="en-US" sz="1300">
                 <a:solidFill>
                   <a:srgbClr val="C9D6EF"/>
                 </a:solidFill>
@@ -7436,7 +7184,7 @@
                 <a:ea typeface="Inter" pitchFamily="34" charset="-122"/>
                 <a:cs typeface="Inter" pitchFamily="34" charset="-120"/>
               </a:rPr>
-              <a:t>Lolos UAT tahap 1 (modul operasional)</a:t>
+              <a:t>Pengerjaan selesai, siap diuji (akhir bulan 1)</a:t>
             </a:r>
             <a:endParaRPr lang="en-US" sz="1300" dirty="0"/>
           </a:p>
@@ -7589,7 +7337,7 @@
               <a:buNone/>
             </a:pPr>
             <a:r>
-              <a:rPr lang="en-US" sz="1300" dirty="0">
+              <a:rPr lang="en-US" sz="1300">
                 <a:solidFill>
                   <a:srgbClr val="C9D6EF"/>
                 </a:solidFill>
@@ -7597,7 +7345,7 @@
                 <a:ea typeface="Inter" pitchFamily="34" charset="-122"/>
                 <a:cs typeface="Inter" pitchFamily="34" charset="-120"/>
               </a:rPr>
-              <a:t>Go-live, sistem dipakai harian</a:t>
+              <a:t>Lolos testing, go-live (akhir bulan 2)</a:t>
             </a:r>
             <a:endParaRPr lang="en-US" sz="1300" dirty="0"/>
           </a:p>
@@ -7750,7 +7498,7 @@
               <a:buNone/>
             </a:pPr>
             <a:r>
-              <a:rPr lang="en-US" sz="1300" dirty="0">
+              <a:rPr lang="fr-FR" sz="1300">
                 <a:solidFill>
                   <a:srgbClr val="E3EBFB"/>
                 </a:solidFill>
@@ -7758,7 +7506,7 @@
                 <a:ea typeface="Inter" pitchFamily="34" charset="-122"/>
                 <a:cs typeface="Inter" pitchFamily="34" charset="-120"/>
               </a:rPr>
-              <a:t>Akhir masa pendampingan 4 bulan</a:t>
+              <a:t>Akhir masa maintenance (bulan 5)</a:t>
             </a:r>
             <a:endParaRPr lang="en-US" sz="1300" dirty="0"/>
           </a:p>
@@ -8086,7 +7834,7 @@
               <a:buChar char="•"/>
             </a:pPr>
             <a:r>
-              <a:rPr lang="en-US" sz="1300" dirty="0">
+              <a:rPr lang="en-US" sz="1300">
                 <a:solidFill>
                   <a:srgbClr val="4A5670"/>
                 </a:solidFill>
@@ -8096,7 +7844,6 @@
               </a:rPr>
               <a:t>Semua modul di proposal ini</a:t>
             </a:r>
-            <a:endParaRPr lang="en-US" sz="1300" dirty="0"/>
           </a:p>
           <a:p>
             <a:pPr marL="155956" indent="-155956" algn="l">
@@ -8107,7 +7854,7 @@
               <a:buChar char="•"/>
             </a:pPr>
             <a:r>
-              <a:rPr lang="en-US" sz="1300" dirty="0">
+              <a:rPr lang="en-US" sz="1300">
                 <a:solidFill>
                   <a:srgbClr val="4A5670"/>
                 </a:solidFill>
@@ -8115,9 +7862,8 @@
                 <a:ea typeface="Inter" pitchFamily="34" charset="-122"/>
                 <a:cs typeface="Inter" pitchFamily="34" charset="-120"/>
               </a:rPr>
-              <a:t>Server cloud, domain &amp; SSL tahun pertama</a:t>
-            </a:r>
-            <a:endParaRPr lang="en-US" sz="1300" dirty="0"/>
+              <a:t>Hosting, domain &amp; SSL tahun pertama</a:t>
+            </a:r>
           </a:p>
           <a:p>
             <a:pPr marL="155956" indent="-155956" algn="l">
@@ -8128,7 +7874,7 @@
               <a:buChar char="•"/>
             </a:pPr>
             <a:r>
-              <a:rPr lang="en-US" sz="1300" dirty="0">
+              <a:rPr lang="en-US" sz="1300">
                 <a:solidFill>
                   <a:srgbClr val="4A5670"/>
                 </a:solidFill>
@@ -8136,9 +7882,8 @@
                 <a:ea typeface="Inter" pitchFamily="34" charset="-122"/>
                 <a:cs typeface="Inter" pitchFamily="34" charset="-120"/>
               </a:rPr>
-              <a:t>Migrasi data dari Excel / sistem lama</a:t>
-            </a:r>
-            <a:endParaRPr lang="en-US" sz="1300" dirty="0"/>
+              <a:t>Maintenance web server &amp; backup database mingguan tahun pertama</a:t>
+            </a:r>
           </a:p>
           <a:p>
             <a:pPr marL="155956" indent="-155956" algn="l">
@@ -8149,7 +7894,7 @@
               <a:buChar char="•"/>
             </a:pPr>
             <a:r>
-              <a:rPr lang="en-US" sz="1300" dirty="0">
+              <a:rPr lang="en-US" sz="1300">
                 <a:solidFill>
                   <a:srgbClr val="4A5670"/>
                 </a:solidFill>
@@ -8157,9 +7902,8 @@
                 <a:ea typeface="Inter" pitchFamily="34" charset="-122"/>
                 <a:cs typeface="Inter" pitchFamily="34" charset="-120"/>
               </a:rPr>
-              <a:t>Pelatihan per peran &amp; panduan pengguna</a:t>
-            </a:r>
-            <a:endParaRPr lang="en-US" sz="1300" dirty="0"/>
+              <a:t>Migrasi data dari Excel / sistem lama</a:t>
+            </a:r>
           </a:p>
           <a:p>
             <a:pPr marL="155956" indent="-155956" algn="l">
@@ -8170,7 +7914,7 @@
               <a:buChar char="•"/>
             </a:pPr>
             <a:r>
-              <a:rPr lang="en-US" sz="1300" dirty="0">
+              <a:rPr lang="en-US" sz="1300">
                 <a:solidFill>
                   <a:srgbClr val="4A5670"/>
                 </a:solidFill>
@@ -8178,9 +7922,8 @@
                 <a:ea typeface="Inter" pitchFamily="34" charset="-122"/>
                 <a:cs typeface="Inter" pitchFamily="34" charset="-120"/>
               </a:rPr>
-              <a:t>UAT, go-live, pendampingan 4 bulan</a:t>
-            </a:r>
-            <a:endParaRPr lang="en-US" sz="1300" dirty="0"/>
+              <a:t>Pelatihan per peran &amp; panduan pengguna</a:t>
+            </a:r>
           </a:p>
           <a:p>
             <a:pPr marL="155956" indent="-155956" algn="l">
@@ -8191,7 +7934,7 @@
               <a:buChar char="•"/>
             </a:pPr>
             <a:r>
-              <a:rPr lang="en-US" sz="1300" dirty="0">
+              <a:rPr lang="en-US" sz="1300">
                 <a:solidFill>
                   <a:srgbClr val="4A5670"/>
                 </a:solidFill>
@@ -8199,7 +7942,27 @@
                 <a:ea typeface="Inter" pitchFamily="34" charset="-122"/>
                 <a:cs typeface="Inter" pitchFamily="34" charset="-120"/>
               </a:rPr>
-              <a:t>Perbaikan bug tanpa biaya selama pendampingan</a:t>
+              <a:t>Testing, go-live &amp; maintenance 4 bulan</a:t>
+            </a:r>
+          </a:p>
+          <a:p>
+            <a:pPr marL="155956" indent="-155956" algn="l">
+              <a:lnSpc>
+                <a:spcPts val="1885"/>
+              </a:lnSpc>
+              <a:buSzPct val="100000"/>
+              <a:buChar char="•"/>
+            </a:pPr>
+            <a:r>
+              <a:rPr lang="en-US" sz="1300">
+                <a:solidFill>
+                  <a:srgbClr val="4A5670"/>
+                </a:solidFill>
+                <a:latin typeface="Inter" pitchFamily="34" charset="0"/>
+                <a:ea typeface="Inter" pitchFamily="34" charset="-122"/>
+                <a:cs typeface="Inter" pitchFamily="34" charset="-120"/>
+              </a:rPr>
+              <a:t>Perbaikan bug tanpa biaya selama masa maintenance</a:t>
             </a:r>
             <a:endParaRPr lang="en-US" sz="1300" dirty="0"/>
           </a:p>
@@ -8398,7 +8161,7 @@
               <a:buChar char="•"/>
             </a:pPr>
             <a:r>
-              <a:rPr lang="en-US" sz="1300" dirty="0">
+              <a:rPr lang="en-US" sz="1300">
                 <a:solidFill>
                   <a:srgbClr val="4A5670"/>
                 </a:solidFill>
@@ -8406,7 +8169,7 @@
                 <a:ea typeface="Inter" pitchFamily="34" charset="-122"/>
                 <a:cs typeface="Inter" pitchFamily="34" charset="-120"/>
               </a:rPr>
-              <a:t>Biaya server mulai tahun kedua</a:t>
+              <a:t>Hosting &amp; maintenance mulai tahun kedua</a:t>
             </a:r>
             <a:endParaRPr lang="en-US" sz="1300" dirty="0"/>
           </a:p>
@@ -8519,7 +8282,7 @@
               <a:buNone/>
             </a:pPr>
             <a:r>
-              <a:rPr lang="en-US" sz="1200" b="1" kern="0" spc="150" dirty="0">
+              <a:rPr lang="en-US" sz="1200" b="1" kern="0" spc="150">
                 <a:solidFill>
                   <a:srgbClr val="2557D6"/>
                 </a:solidFill>
@@ -8527,7 +8290,7 @@
                 <a:ea typeface="Inter" pitchFamily="34" charset="-122"/>
                 <a:cs typeface="Inter" pitchFamily="34" charset="-120"/>
               </a:rPr>
-              <a:t>SETELAH PENDAMPINGAN</a:t>
+              <a:t>SETELAH TAHUN PERTAMA</a:t>
             </a:r>
             <a:endParaRPr lang="en-US" sz="1200" dirty="0"/>
           </a:p>
@@ -8567,7 +8330,7 @@
               <a:buNone/>
             </a:pPr>
             <a:r>
-              <a:rPr lang="en-US" sz="3200" b="1" i="0" dirty="0">
+              <a:rPr lang="fi-FI" sz="3200" b="1" i="0">
                 <a:solidFill>
                   <a:srgbClr val="16233F"/>
                 </a:solidFill>
@@ -8575,7 +8338,7 @@
                 <a:ea typeface="Plus Jakarta Sans" pitchFamily="34" charset="-122"/>
                 <a:cs typeface="Plus Jakarta Sans" pitchFamily="34" charset="-120"/>
               </a:rPr>
-              <a:t>Biaya lanjutan yang perlu direncanakan</a:t>
+              <a:t>Biaya rutin mulai tahun ke-2</a:t>
             </a:r>
             <a:endParaRPr lang="en-US" sz="3200" dirty="0"/>
           </a:p>
@@ -8668,7 +8431,7 @@
               <a:buNone/>
             </a:pPr>
             <a:r>
-              <a:rPr lang="en-US" sz="1600" b="1" dirty="0">
+              <a:rPr lang="en-US" sz="1600" b="1">
                 <a:solidFill>
                   <a:srgbClr val="16233F"/>
                 </a:solidFill>
@@ -8676,7 +8439,7 @@
                 <a:ea typeface="Plus Jakarta Sans" pitchFamily="34" charset="-122"/>
                 <a:cs typeface="Plus Jakarta Sans" pitchFamily="34" charset="-120"/>
               </a:rPr>
-              <a:t>Server tahun ke-2 dst.</a:t>
+              <a:t>Hosting, domain &amp; SSL</a:t>
             </a:r>
             <a:endParaRPr lang="en-US" sz="1600" dirty="0"/>
           </a:p>
@@ -8756,7 +8519,7 @@
               <a:buNone/>
             </a:pPr>
             <a:r>
-              <a:rPr lang="en-US" sz="1300" dirty="0">
+              <a:rPr lang="en-US" sz="1300">
                 <a:solidFill>
                   <a:srgbClr val="4A5670"/>
                 </a:solidFill>
@@ -8764,7 +8527,7 @@
                 <a:ea typeface="Inter" pitchFamily="34" charset="-122"/>
                 <a:cs typeface="Inter" pitchFamily="34" charset="-120"/>
               </a:rPr>
-              <a:t>Estimasi, mengikuti harga penyedia cloud saat perpanjangan.</a:t>
+              <a:t>Gratis tahun pertama. Mengikuti harga penyedia cloud saat perpanjangan.</a:t>
             </a:r>
             <a:endParaRPr lang="en-US" sz="1300" dirty="0"/>
           </a:p>
@@ -8857,7 +8620,7 @@
               <a:buNone/>
             </a:pPr>
             <a:r>
-              <a:rPr lang="en-US" sz="1600" b="1" dirty="0">
+              <a:rPr lang="en-US" sz="1600" b="1">
                 <a:solidFill>
                   <a:srgbClr val="16233F"/>
                 </a:solidFill>
@@ -8865,7 +8628,7 @@
                 <a:ea typeface="Plus Jakarta Sans" pitchFamily="34" charset="-122"/>
                 <a:cs typeface="Plus Jakarta Sans" pitchFamily="34" charset="-120"/>
               </a:rPr>
-              <a:t>Dukungan bulanan</a:t>
+              <a:t>Maintenance &amp; backup</a:t>
             </a:r>
             <a:endParaRPr lang="en-US" sz="1600" dirty="0"/>
           </a:p>
@@ -8901,7 +8664,7 @@
               <a:buNone/>
             </a:pPr>
             <a:r>
-              <a:rPr lang="en-US" sz="2200" b="1" dirty="0">
+              <a:rPr lang="en-US" sz="2200" b="1">
                 <a:solidFill>
                   <a:srgbClr val="2557D6"/>
                 </a:solidFill>
@@ -8909,7 +8672,7 @@
                 <a:ea typeface="Plus Jakarta Sans" pitchFamily="34" charset="-122"/>
                 <a:cs typeface="Plus Jakarta Sans" pitchFamily="34" charset="-120"/>
               </a:rPr>
-              <a:t>[Rp__ / bulan]</a:t>
+              <a:t>Rp6 jt / tahun</a:t>
             </a:r>
             <a:endParaRPr lang="en-US" sz="2200" dirty="0"/>
           </a:p>
@@ -8945,7 +8708,7 @@
               <a:buNone/>
             </a:pPr>
             <a:r>
-              <a:rPr lang="en-US" sz="1300" dirty="0">
+              <a:rPr lang="fi-FI" sz="1300">
                 <a:solidFill>
                   <a:srgbClr val="4A5670"/>
                 </a:solidFill>
@@ -8953,7 +8716,7 @@
                 <a:ea typeface="Inter" pitchFamily="34" charset="-122"/>
                 <a:cs typeface="Inter" pitchFamily="34" charset="-120"/>
               </a:rPr>
-              <a:t>Opsional: perbaikan, backup, update keamanan, bantuan pengguna.</a:t>
+              <a:t>Gratis tahun pertama. Keamanan, monitoring &amp; backup mingguan.</a:t>
             </a:r>
             <a:endParaRPr lang="en-US" sz="1300" dirty="0"/>
           </a:p>
@@ -9178,7 +8941,7 @@
               <a:buNone/>
             </a:pPr>
             <a:r>
-              <a:rPr lang="en-US" sz="1400" dirty="0">
+              <a:rPr lang="en-US" sz="1400" b="1">
                 <a:solidFill>
                   <a:srgbClr val="4A5670"/>
                 </a:solidFill>
@@ -9186,7 +8949,18 @@
                 <a:ea typeface="Inter" pitchFamily="34" charset="-122"/>
                 <a:cs typeface="Inter" pitchFamily="34" charset="-120"/>
               </a:rPr>
-              <a:t>Disampaikan sejak awal supaya anggaran tahun berikutnya bisa disiapkan.</a:t>
+              <a:t>Total biaya rutin tahun ke-2 dst. ± Rp8,5 jt / tahun</a:t>
+            </a:r>
+            <a:r>
+              <a:rPr lang="en-US" sz="1400">
+                <a:solidFill>
+                  <a:srgbClr val="4A5670"/>
+                </a:solidFill>
+                <a:latin typeface="Inter" pitchFamily="34" charset="0"/>
+                <a:ea typeface="Inter" pitchFamily="34" charset="-122"/>
+                <a:cs typeface="Inter" pitchFamily="34" charset="-120"/>
+              </a:rPr>
+              <a:t> (± Rp710 ribu / bulan).</a:t>
             </a:r>
             <a:endParaRPr lang="en-US" sz="1400" dirty="0"/>
           </a:p>
@@ -9382,7 +9156,7 @@
               <a:buNone/>
             </a:pPr>
             <a:r>
-              <a:rPr lang="en-US" sz="3600" b="1" i="0" dirty="0">
+              <a:rPr lang="it-IT" sz="3600" b="1" i="0">
                 <a:solidFill>
                   <a:srgbClr val="F5F7FB"/>
                 </a:solidFill>
@@ -9390,7 +9164,7 @@
                 <a:ea typeface="Plus Jakarta Sans" pitchFamily="34" charset="-122"/>
                 <a:cs typeface="Plus Jakarta Sans" pitchFamily="34" charset="-120"/>
               </a:rPr>
-              <a:t>Mulai dari demo prototype, go-live 5 bulan kemudian</a:t>
+              <a:t>Mulai dari demo prototype, sistem jalan di bulan ke-2</a:t>
             </a:r>
             <a:endParaRPr lang="en-US" sz="3600" dirty="0"/>
           </a:p>
@@ -9672,7 +9446,7 @@
                 <a:ea typeface="Inter" pitchFamily="34" charset="-122"/>
                 <a:cs typeface="Inter" pitchFamily="34" charset="-120"/>
               </a:rPr>
-              <a:t>Raindi Andreas</a:t>
+              <a:t>Muhamad Erzie Aldrian N.</a:t>
             </a:r>
             <a:endParaRPr lang="en-US" sz="1400" b="1" dirty="0"/>
           </a:p>
@@ -9692,7 +9466,7 @@
                 <a:ea typeface="Inter" pitchFamily="34" charset="-122"/>
                 <a:cs typeface="Inter" pitchFamily="34" charset="-120"/>
               </a:rPr>
-              <a:t>Direktur</a:t>
+              <a:t>Tim IT Freelance</a:t>
             </a:r>
             <a:endParaRPr lang="en-US" sz="1400" dirty="0"/>
           </a:p>
@@ -10391,7 +10165,7 @@
               <a:buNone/>
             </a:pPr>
             <a:r>
-              <a:rPr lang="en-US" sz="1500" b="1" dirty="0">
+              <a:rPr lang="en-US" sz="1500" b="1">
                 <a:solidFill>
                   <a:srgbClr val="16233F"/>
                 </a:solidFill>
@@ -10399,7 +10173,7 @@
                 <a:ea typeface="Inter" pitchFamily="34" charset="-122"/>
                 <a:cs typeface="Inter" pitchFamily="34" charset="-120"/>
               </a:rPr>
-              <a:t>sampai go-live</a:t>
+              <a:t>total pengerjaan</a:t>
             </a:r>
             <a:endParaRPr lang="en-US" sz="1500" dirty="0"/>
           </a:p>
@@ -10435,7 +10209,7 @@
               <a:buNone/>
             </a:pPr>
             <a:r>
-              <a:rPr lang="en-US" sz="1200" dirty="0">
+              <a:rPr lang="en-US" sz="1200">
                 <a:solidFill>
                   <a:srgbClr val="4A5670"/>
                 </a:solidFill>
@@ -10443,7 +10217,7 @@
                 <a:ea typeface="Inter" pitchFamily="34" charset="-122"/>
                 <a:cs typeface="Inter" pitchFamily="34" charset="-120"/>
               </a:rPr>
-              <a:t>Lalu 4 bulan pendampingan &amp; maintenance</a:t>
+              <a:t>1 bulan pengerjaan, 4 bulan testing &amp; maintenance</a:t>
             </a:r>
             <a:endParaRPr lang="en-US" sz="1200" dirty="0"/>
           </a:p>
@@ -10596,7 +10370,7 @@
               <a:buNone/>
             </a:pPr>
             <a:r>
-              <a:rPr lang="en-US" sz="1200" dirty="0">
+              <a:rPr lang="en-US" sz="1200">
                 <a:solidFill>
                   <a:srgbClr val="C9D6EF"/>
                 </a:solidFill>
@@ -10604,7 +10378,7 @@
                 <a:ea typeface="Inter" pitchFamily="34" charset="-122"/>
                 <a:cs typeface="Inter" pitchFamily="34" charset="-120"/>
               </a:rPr>
-              <a:t>Termasuk server 1 tahun, training, migrasi data</a:t>
+              <a:t>Termasuk hosting, backup &amp; maintenance tahun pertama</a:t>
             </a:r>
             <a:endParaRPr lang="en-US" sz="1200" dirty="0"/>
           </a:p>
@@ -17629,7 +17403,7 @@
           <p:nvPr>
             <p:extLst>
               <p:ext uri="{D42A27DB-BD31-4B8C-83A1-F6EECF244321}">
-                <p14:modId xmlns:p14="http://schemas.microsoft.com/office/powerpoint/2010/main" val="1579011935"/>
+                <p14:modId xmlns:p14="http://schemas.microsoft.com/office/powerpoint/2010/main" val="732526069"/>
               </p:ext>
             </p:extLst>
           </p:nvPr>
@@ -18317,7 +18091,7 @@
                         <a:buNone/>
                       </a:pPr>
                       <a:r>
-                        <a:rPr lang="en-US" sz="1400" dirty="0">
+                        <a:rPr lang="en-US" sz="1400">
                           <a:solidFill>
                             <a:srgbClr val="16233F"/>
                           </a:solidFill>
@@ -18325,7 +18099,7 @@
                           <a:ea typeface="Inter" pitchFamily="34" charset="-122"/>
                           <a:cs typeface="Inter" pitchFamily="34" charset="-120"/>
                         </a:rPr>
-                        <a:t>Otomatis harian</a:t>
+                        <a:t>Otomatis mingguan, terpisah dari data utama</a:t>
                       </a:r>
                       <a:endParaRPr lang="en-US" sz="1400" dirty="0">
                         <a:latin typeface="Inter" charset="0"/>

--- a/equiprent-enterprise/excel/Proposal EquipRent Enterprise.pptx
+++ b/equiprent-enterprise/excel/Proposal EquipRent Enterprise.pptx
@@ -2557,70 +2557,6 @@
           </a:p>
         </p:txBody>
       </p:sp>
-      <p:sp>
-        <p:nvSpPr>
-          <p:cNvPr id="11" name="Text 9"/>
-          <p:cNvSpPr/>
-          <p:nvPr/>
-        </p:nvSpPr>
-        <p:spPr>
-          <a:xfrm>
-            <a:off x="8509000" y="2667000"/>
-            <a:ext cx="3139440" cy="695854"/>
-          </a:xfrm>
-          <a:prstGeom prst="rect">
-            <a:avLst/>
-          </a:prstGeom>
-          <a:noFill/>
-          <a:ln/>
-        </p:spPr>
-        <p:txBody>
-          <a:bodyPr wrap="square" lIns="0" tIns="0" rIns="0" bIns="0" rtlCol="0" anchor="t">
-            <a:normAutofit/>
-          </a:bodyPr>
-          <a:lstStyle/>
-          <a:p>
-            <a:pPr marL="0" indent="0" algn="l">
-              <a:lnSpc>
-                <a:spcPts val="2640"/>
-              </a:lnSpc>
-              <a:buNone/>
-            </a:pPr>
-            <a:r>
-              <a:rPr lang="en-US" sz="2200" b="1" dirty="0">
-                <a:solidFill>
-                  <a:srgbClr val="F5F7FB"/>
-                </a:solidFill>
-                <a:latin typeface="Plus Jakarta Sans" pitchFamily="34" charset="0"/>
-                <a:ea typeface="Plus Jakarta Sans" pitchFamily="34" charset="-122"/>
-                <a:cs typeface="Plus Jakarta Sans" pitchFamily="34" charset="-120"/>
-              </a:rPr>
-              <a:t>Rp100.000.000</a:t>
-            </a:r>
-            <a:endParaRPr lang="en-US" sz="2200" dirty="0"/>
-          </a:p>
-          <a:p>
-            <a:pPr marL="0" indent="0" algn="l">
-              <a:lnSpc>
-                <a:spcPts val="2640"/>
-              </a:lnSpc>
-              <a:buNone/>
-            </a:pPr>
-            <a:r>
-              <a:rPr lang="en-US" sz="2200" b="1" dirty="0">
-                <a:solidFill>
-                  <a:srgbClr val="BFD3FB"/>
-                </a:solidFill>
-                <a:latin typeface="Plus Jakarta Sans" pitchFamily="34" charset="0"/>
-                <a:ea typeface="Plus Jakarta Sans" pitchFamily="34" charset="-122"/>
-                <a:cs typeface="Plus Jakarta Sans" pitchFamily="34" charset="-120"/>
-              </a:rPr>
-              <a:t>fixed price · all-in</a:t>
-            </a:r>
-            <a:endParaRPr lang="en-US" sz="2200" dirty="0"/>
-          </a:p>
-        </p:txBody>
-      </p:sp>
     </p:spTree>
   </p:cSld>
   <p:clrMapOvr>
@@ -2762,7 +2698,7 @@
         </p:nvGraphicFramePr>
         <p:xfrm>
           <a:off x="824089" y="1873513"/>
-          <a:ext cx="10555111" cy="2840567"/>
+          <a:ext cx="10555111" cy="2646053"/>
         </p:xfrm>
         <a:graphic>
           <a:graphicData uri="http://schemas.openxmlformats.org/drawingml/2006/table">
@@ -4582,7 +4518,7 @@
         </p:spPr>
         <p:txBody>
           <a:bodyPr wrap="square" lIns="0" tIns="0" rIns="0" bIns="0" rtlCol="0" anchor="t">
-            <a:normAutofit/>
+            <a:normAutofit fontScale="32500" lnSpcReduction="20000"/>
           </a:bodyPr>
           <a:lstStyle/>
           <a:p>
@@ -4623,7 +4559,7 @@
         </p:nvGraphicFramePr>
         <p:xfrm>
           <a:off x="4329289" y="824089"/>
-          <a:ext cx="7049911" cy="4636382"/>
+          <a:ext cx="7049911" cy="4636380"/>
         </p:xfrm>
         <a:graphic>
           <a:graphicData uri="http://schemas.openxmlformats.org/drawingml/2006/table">
@@ -7805,171 +7741,6 @@
       </p:sp>
       <p:sp>
         <p:nvSpPr>
-          <p:cNvPr id="6" name="Text 4"/>
-          <p:cNvSpPr/>
-          <p:nvPr/>
-        </p:nvSpPr>
-        <p:spPr>
-          <a:xfrm>
-            <a:off x="1170488" y="2523158"/>
-            <a:ext cx="4722678" cy="1461558"/>
-          </a:xfrm>
-          <a:prstGeom prst="rect">
-            <a:avLst/>
-          </a:prstGeom>
-          <a:noFill/>
-          <a:ln/>
-        </p:spPr>
-        <p:txBody>
-          <a:bodyPr wrap="square" lIns="0" tIns="0" rIns="0" bIns="0" rtlCol="0" anchor="t">
-            <a:normAutofit/>
-          </a:bodyPr>
-          <a:lstStyle/>
-          <a:p>
-            <a:pPr marL="155956" indent="-155956" algn="l">
-              <a:lnSpc>
-                <a:spcPts val="1885"/>
-              </a:lnSpc>
-              <a:buSzPct val="100000"/>
-              <a:buChar char="•"/>
-            </a:pPr>
-            <a:r>
-              <a:rPr lang="en-US" sz="1300">
-                <a:solidFill>
-                  <a:srgbClr val="4A5670"/>
-                </a:solidFill>
-                <a:latin typeface="Inter" pitchFamily="34" charset="0"/>
-                <a:ea typeface="Inter" pitchFamily="34" charset="-122"/>
-                <a:cs typeface="Inter" pitchFamily="34" charset="-120"/>
-              </a:rPr>
-              <a:t>Semua modul di proposal ini</a:t>
-            </a:r>
-          </a:p>
-          <a:p>
-            <a:pPr marL="155956" indent="-155956" algn="l">
-              <a:lnSpc>
-                <a:spcPts val="1885"/>
-              </a:lnSpc>
-              <a:buSzPct val="100000"/>
-              <a:buChar char="•"/>
-            </a:pPr>
-            <a:r>
-              <a:rPr lang="en-US" sz="1300">
-                <a:solidFill>
-                  <a:srgbClr val="4A5670"/>
-                </a:solidFill>
-                <a:latin typeface="Inter" pitchFamily="34" charset="0"/>
-                <a:ea typeface="Inter" pitchFamily="34" charset="-122"/>
-                <a:cs typeface="Inter" pitchFamily="34" charset="-120"/>
-              </a:rPr>
-              <a:t>Hosting, domain &amp; SSL tahun pertama</a:t>
-            </a:r>
-          </a:p>
-          <a:p>
-            <a:pPr marL="155956" indent="-155956" algn="l">
-              <a:lnSpc>
-                <a:spcPts val="1885"/>
-              </a:lnSpc>
-              <a:buSzPct val="100000"/>
-              <a:buChar char="•"/>
-            </a:pPr>
-            <a:r>
-              <a:rPr lang="en-US" sz="1300">
-                <a:solidFill>
-                  <a:srgbClr val="4A5670"/>
-                </a:solidFill>
-                <a:latin typeface="Inter" pitchFamily="34" charset="0"/>
-                <a:ea typeface="Inter" pitchFamily="34" charset="-122"/>
-                <a:cs typeface="Inter" pitchFamily="34" charset="-120"/>
-              </a:rPr>
-              <a:t>Maintenance web server &amp; backup database mingguan tahun pertama</a:t>
-            </a:r>
-          </a:p>
-          <a:p>
-            <a:pPr marL="155956" indent="-155956" algn="l">
-              <a:lnSpc>
-                <a:spcPts val="1885"/>
-              </a:lnSpc>
-              <a:buSzPct val="100000"/>
-              <a:buChar char="•"/>
-            </a:pPr>
-            <a:r>
-              <a:rPr lang="en-US" sz="1300">
-                <a:solidFill>
-                  <a:srgbClr val="4A5670"/>
-                </a:solidFill>
-                <a:latin typeface="Inter" pitchFamily="34" charset="0"/>
-                <a:ea typeface="Inter" pitchFamily="34" charset="-122"/>
-                <a:cs typeface="Inter" pitchFamily="34" charset="-120"/>
-              </a:rPr>
-              <a:t>Migrasi data dari Excel / sistem lama</a:t>
-            </a:r>
-          </a:p>
-          <a:p>
-            <a:pPr marL="155956" indent="-155956" algn="l">
-              <a:lnSpc>
-                <a:spcPts val="1885"/>
-              </a:lnSpc>
-              <a:buSzPct val="100000"/>
-              <a:buChar char="•"/>
-            </a:pPr>
-            <a:r>
-              <a:rPr lang="en-US" sz="1300">
-                <a:solidFill>
-                  <a:srgbClr val="4A5670"/>
-                </a:solidFill>
-                <a:latin typeface="Inter" pitchFamily="34" charset="0"/>
-                <a:ea typeface="Inter" pitchFamily="34" charset="-122"/>
-                <a:cs typeface="Inter" pitchFamily="34" charset="-120"/>
-              </a:rPr>
-              <a:t>Pelatihan per peran &amp; panduan pengguna</a:t>
-            </a:r>
-          </a:p>
-          <a:p>
-            <a:pPr marL="155956" indent="-155956" algn="l">
-              <a:lnSpc>
-                <a:spcPts val="1885"/>
-              </a:lnSpc>
-              <a:buSzPct val="100000"/>
-              <a:buChar char="•"/>
-            </a:pPr>
-            <a:r>
-              <a:rPr lang="en-US" sz="1300">
-                <a:solidFill>
-                  <a:srgbClr val="4A5670"/>
-                </a:solidFill>
-                <a:latin typeface="Inter" pitchFamily="34" charset="0"/>
-                <a:ea typeface="Inter" pitchFamily="34" charset="-122"/>
-                <a:cs typeface="Inter" pitchFamily="34" charset="-120"/>
-              </a:rPr>
-              <a:t>Testing, go-live &amp; maintenance 4 bulan</a:t>
-            </a:r>
-          </a:p>
-          <a:p>
-            <a:pPr marL="155956" indent="-155956" algn="l">
-              <a:lnSpc>
-                <a:spcPts val="1885"/>
-              </a:lnSpc>
-              <a:buSzPct val="100000"/>
-              <a:buChar char="•"/>
-            </a:pPr>
-            <a:r>
-              <a:rPr lang="en-US" sz="1300">
-                <a:solidFill>
-                  <a:srgbClr val="4A5670"/>
-                </a:solidFill>
-                <a:latin typeface="Inter" pitchFamily="34" charset="0"/>
-                <a:ea typeface="Inter" pitchFamily="34" charset="-122"/>
-                <a:cs typeface="Inter" pitchFamily="34" charset="-120"/>
-              </a:rPr>
-              <a:t>Perbaikan bug tanpa biaya selama masa maintenance</a:t>
-            </a:r>
-            <a:endParaRPr lang="en-US" sz="1300" dirty="0"/>
-          </a:p>
-        </p:txBody>
-      </p:sp>
-      <p:sp>
-        <p:nvSpPr>
           <p:cNvPr id="7" name="Shape 5"/>
           <p:cNvSpPr/>
           <p:nvPr/>
@@ -8161,7 +7932,7 @@
               <a:buChar char="•"/>
             </a:pPr>
             <a:r>
-              <a:rPr lang="en-US" sz="1300">
+              <a:rPr lang="en-US" sz="1300" dirty="0">
                 <a:solidFill>
                   <a:srgbClr val="4A5670"/>
                 </a:solidFill>
@@ -8169,7 +7940,62 @@
                 <a:ea typeface="Inter" pitchFamily="34" charset="-122"/>
                 <a:cs typeface="Inter" pitchFamily="34" charset="-120"/>
               </a:rPr>
-              <a:t>Hosting &amp; maintenance mulai tahun kedua</a:t>
+              <a:t>Hosting &amp; maintenance </a:t>
+            </a:r>
+            <a:r>
+              <a:rPr lang="en-US" sz="1300" dirty="0" err="1">
+                <a:solidFill>
+                  <a:srgbClr val="4A5670"/>
+                </a:solidFill>
+                <a:latin typeface="Inter" pitchFamily="34" charset="0"/>
+                <a:ea typeface="Inter" pitchFamily="34" charset="-122"/>
+                <a:cs typeface="Inter" pitchFamily="34" charset="-120"/>
+              </a:rPr>
+              <a:t>mulai</a:t>
+            </a:r>
+            <a:r>
+              <a:rPr lang="en-US" sz="1300" dirty="0">
+                <a:solidFill>
+                  <a:srgbClr val="4A5670"/>
+                </a:solidFill>
+                <a:latin typeface="Inter" pitchFamily="34" charset="0"/>
+                <a:ea typeface="Inter" pitchFamily="34" charset="-122"/>
+                <a:cs typeface="Inter" pitchFamily="34" charset="-120"/>
+              </a:rPr>
+              <a:t> </a:t>
+            </a:r>
+            <a:r>
+              <a:rPr lang="en-US" sz="1300" dirty="0" err="1">
+                <a:solidFill>
+                  <a:srgbClr val="4A5670"/>
+                </a:solidFill>
+                <a:latin typeface="Inter" pitchFamily="34" charset="0"/>
+                <a:ea typeface="Inter" pitchFamily="34" charset="-122"/>
+                <a:cs typeface="Inter" pitchFamily="34" charset="-120"/>
+              </a:rPr>
+              <a:t>tahun</a:t>
+            </a:r>
+            <a:r>
+              <a:rPr lang="en-US" sz="1300" dirty="0">
+                <a:solidFill>
+                  <a:srgbClr val="4A5670"/>
+                </a:solidFill>
+                <a:latin typeface="Inter" pitchFamily="34" charset="0"/>
+                <a:ea typeface="Inter" pitchFamily="34" charset="-122"/>
+                <a:cs typeface="Inter" pitchFamily="34" charset="-120"/>
+              </a:rPr>
+              <a:t> </a:t>
+            </a:r>
+            <a:r>
+              <a:rPr lang="en-US" sz="1300" dirty="0" err="1">
+                <a:solidFill>
+                  <a:srgbClr val="4A5670"/>
+                </a:solidFill>
+                <a:latin typeface="Inter" pitchFamily="34" charset="0"/>
+                <a:ea typeface="Inter" pitchFamily="34" charset="-122"/>
+                <a:cs typeface="Inter" pitchFamily="34" charset="-120"/>
+              </a:rPr>
+              <a:t>kedua</a:t>
             </a:r>
             <a:endParaRPr lang="en-US" sz="1300" dirty="0"/>
           </a:p>
@@ -8216,6 +8042,253 @@
               <a:t>EquipRent Enterprise · Proposal 2026 · 13</a:t>
             </a:r>
             <a:endParaRPr lang="en-US" sz="1200" dirty="0"/>
+          </a:p>
+        </p:txBody>
+      </p:sp>
+      <p:sp>
+        <p:nvSpPr>
+          <p:cNvPr id="12" name="Text 7">
+            <a:extLst>
+              <a:ext uri="{FF2B5EF4-FFF2-40B4-BE49-F238E27FC236}">
+                <a16:creationId xmlns:a16="http://schemas.microsoft.com/office/drawing/2014/main" id="{5246F0B6-065D-119A-75B5-81D1F08FC10E}"/>
+              </a:ext>
+            </a:extLst>
+          </p:cNvPr>
+          <p:cNvSpPr/>
+          <p:nvPr/>
+        </p:nvSpPr>
+        <p:spPr>
+          <a:xfrm>
+            <a:off x="1178108" y="2523157"/>
+            <a:ext cx="4722678" cy="1779336"/>
+          </a:xfrm>
+          <a:prstGeom prst="rect">
+            <a:avLst/>
+          </a:prstGeom>
+          <a:noFill/>
+          <a:ln/>
+        </p:spPr>
+        <p:txBody>
+          <a:bodyPr wrap="square" lIns="0" tIns="0" rIns="0" bIns="0" rtlCol="0" anchor="t">
+            <a:normAutofit/>
+          </a:bodyPr>
+          <a:lstStyle/>
+          <a:p>
+            <a:pPr marL="155956" indent="-155956">
+              <a:buSzPct val="100000"/>
+              <a:buChar char="•"/>
+            </a:pPr>
+            <a:r>
+              <a:rPr lang="en-US" sz="1400" dirty="0" err="1"/>
+              <a:t>Semua</a:t>
+            </a:r>
+            <a:r>
+              <a:rPr lang="en-US" sz="1400" dirty="0"/>
+              <a:t> </a:t>
+            </a:r>
+            <a:r>
+              <a:rPr lang="en-US" sz="1400" dirty="0" err="1"/>
+              <a:t>modul</a:t>
+            </a:r>
+            <a:r>
+              <a:rPr lang="en-US" sz="1400" dirty="0"/>
+              <a:t> </a:t>
+            </a:r>
+            <a:r>
+              <a:rPr lang="en-US" sz="1400" dirty="0" err="1"/>
+              <a:t>dalam</a:t>
+            </a:r>
+            <a:r>
+              <a:rPr lang="en-US" sz="1400" dirty="0"/>
+              <a:t> proposal </a:t>
+            </a:r>
+            <a:r>
+              <a:rPr lang="en-US" sz="1400" dirty="0" err="1"/>
+              <a:t>ini</a:t>
+            </a:r>
+            <a:endParaRPr lang="en-US" sz="1400" dirty="0"/>
+          </a:p>
+          <a:p>
+            <a:pPr marL="155956" indent="-155956">
+              <a:buSzPct val="100000"/>
+              <a:buChar char="•"/>
+            </a:pPr>
+            <a:r>
+              <a:rPr lang="en-US" sz="1400" dirty="0"/>
+              <a:t>Hosting, domain &amp; SSL </a:t>
+            </a:r>
+            <a:r>
+              <a:rPr lang="en-US" sz="1400" dirty="0" err="1"/>
+              <a:t>tahun</a:t>
+            </a:r>
+            <a:r>
+              <a:rPr lang="en-US" sz="1400" dirty="0"/>
+              <a:t> </a:t>
+            </a:r>
+            <a:r>
+              <a:rPr lang="en-US" sz="1400" dirty="0" err="1"/>
+              <a:t>pertama</a:t>
+            </a:r>
+            <a:r>
+              <a:rPr lang="en-US" sz="1400" dirty="0"/>
+              <a:t> </a:t>
+            </a:r>
+          </a:p>
+          <a:p>
+            <a:pPr marL="155956" indent="-155956">
+              <a:buSzPct val="100000"/>
+              <a:buChar char="•"/>
+            </a:pPr>
+            <a:r>
+              <a:rPr lang="en-US" sz="1400" dirty="0"/>
+              <a:t>Maintenance web server &amp; backup database </a:t>
+            </a:r>
+            <a:r>
+              <a:rPr lang="en-US" sz="1400" dirty="0" err="1"/>
+              <a:t>mingguan</a:t>
+            </a:r>
+            <a:r>
+              <a:rPr lang="en-US" sz="1400" dirty="0"/>
+              <a:t> </a:t>
+            </a:r>
+            <a:r>
+              <a:rPr lang="en-US" sz="1400" dirty="0" err="1"/>
+              <a:t>tahun</a:t>
+            </a:r>
+            <a:r>
+              <a:rPr lang="en-US" sz="1400" dirty="0"/>
+              <a:t> </a:t>
+            </a:r>
+            <a:r>
+              <a:rPr lang="en-US" sz="1400" dirty="0" err="1"/>
+              <a:t>pertama</a:t>
+            </a:r>
+            <a:endParaRPr lang="en-US" sz="1400" dirty="0"/>
+          </a:p>
+          <a:p>
+            <a:pPr marL="155956" indent="-155956">
+              <a:buSzPct val="100000"/>
+              <a:buChar char="•"/>
+            </a:pPr>
+            <a:r>
+              <a:rPr lang="en-US" sz="1400" dirty="0" err="1"/>
+              <a:t>Migrasi</a:t>
+            </a:r>
+            <a:r>
+              <a:rPr lang="en-US" sz="1400" dirty="0"/>
+              <a:t> data </a:t>
+            </a:r>
+            <a:r>
+              <a:rPr lang="en-US" sz="1400" dirty="0" err="1"/>
+              <a:t>dari</a:t>
+            </a:r>
+            <a:r>
+              <a:rPr lang="en-US" sz="1400" dirty="0"/>
+              <a:t> Excel / </a:t>
+            </a:r>
+            <a:r>
+              <a:rPr lang="en-US" sz="1400" dirty="0" err="1"/>
+              <a:t>sistem</a:t>
+            </a:r>
+            <a:r>
+              <a:rPr lang="en-US" sz="1400" dirty="0"/>
+              <a:t> lama </a:t>
+            </a:r>
+          </a:p>
+          <a:p>
+            <a:pPr marL="155956" indent="-155956">
+              <a:buSzPct val="100000"/>
+              <a:buChar char="•"/>
+            </a:pPr>
+            <a:r>
+              <a:rPr lang="en-US" sz="1400" dirty="0" err="1"/>
+              <a:t>Pelatihan</a:t>
+            </a:r>
+            <a:r>
+              <a:rPr lang="en-US" sz="1400" dirty="0"/>
+              <a:t> per </a:t>
+            </a:r>
+            <a:r>
+              <a:rPr lang="en-US" sz="1400" dirty="0" err="1"/>
+              <a:t>peran</a:t>
+            </a:r>
+            <a:r>
+              <a:rPr lang="en-US" sz="1400" dirty="0"/>
+              <a:t> &amp; </a:t>
+            </a:r>
+            <a:r>
+              <a:rPr lang="en-US" sz="1400" dirty="0" err="1"/>
+              <a:t>panduan</a:t>
+            </a:r>
+            <a:r>
+              <a:rPr lang="en-US" sz="1400" dirty="0"/>
+              <a:t> </a:t>
+            </a:r>
+            <a:r>
+              <a:rPr lang="en-US" sz="1400" dirty="0" err="1"/>
+              <a:t>pengguna</a:t>
+            </a:r>
+            <a:r>
+              <a:rPr lang="en-US" sz="1400" dirty="0"/>
+              <a:t> </a:t>
+            </a:r>
+          </a:p>
+          <a:p>
+            <a:pPr marL="155956" indent="-155956">
+              <a:buSzPct val="100000"/>
+              <a:buChar char="•"/>
+            </a:pPr>
+            <a:r>
+              <a:rPr lang="en-US" sz="1400" dirty="0"/>
+              <a:t>Testing, go-live &amp; maintenance 4 </a:t>
+            </a:r>
+            <a:r>
+              <a:rPr lang="en-US" sz="1400" dirty="0" err="1"/>
+              <a:t>bulan</a:t>
+            </a:r>
+            <a:r>
+              <a:rPr lang="en-US" sz="1400" dirty="0"/>
+              <a:t> </a:t>
+            </a:r>
+          </a:p>
+          <a:p>
+            <a:pPr marL="155956" indent="-155956">
+              <a:buSzPct val="100000"/>
+              <a:buChar char="•"/>
+            </a:pPr>
+            <a:r>
+              <a:rPr lang="en-US" sz="1400" dirty="0" err="1"/>
+              <a:t>Perbaikan</a:t>
+            </a:r>
+            <a:r>
+              <a:rPr lang="en-US" sz="1400" dirty="0"/>
+              <a:t> bug </a:t>
+            </a:r>
+            <a:r>
+              <a:rPr lang="en-US" sz="1400" dirty="0" err="1"/>
+              <a:t>tanpa</a:t>
+            </a:r>
+            <a:r>
+              <a:rPr lang="en-US" sz="1400" dirty="0"/>
+              <a:t> </a:t>
+            </a:r>
+            <a:r>
+              <a:rPr lang="en-US" sz="1400" dirty="0" err="1"/>
+              <a:t>biaya</a:t>
+            </a:r>
+            <a:r>
+              <a:rPr lang="en-US" sz="1400" dirty="0"/>
+              <a:t> </a:t>
+            </a:r>
+            <a:r>
+              <a:rPr lang="en-US" sz="1400" dirty="0" err="1"/>
+              <a:t>selama</a:t>
+            </a:r>
+            <a:r>
+              <a:rPr lang="en-US" sz="1400" dirty="0"/>
+              <a:t> masa maintenance</a:t>
+            </a:r>
+            <a:endParaRPr lang="en-US" sz="1300" dirty="0"/>
           </a:p>
         </p:txBody>
       </p:sp>
@@ -8913,61 +8986,6 @@
       </p:sp>
       <p:sp>
         <p:nvSpPr>
-          <p:cNvPr id="19" name="Text 14"/>
-          <p:cNvSpPr/>
-          <p:nvPr/>
-        </p:nvSpPr>
-        <p:spPr>
-          <a:xfrm>
-            <a:off x="812800" y="4469166"/>
-            <a:ext cx="10883392" cy="274285"/>
-          </a:xfrm>
-          <a:prstGeom prst="rect">
-            <a:avLst/>
-          </a:prstGeom>
-          <a:noFill/>
-          <a:ln/>
-        </p:spPr>
-        <p:txBody>
-          <a:bodyPr wrap="square" lIns="0" tIns="0" rIns="0" bIns="0" rtlCol="0" anchor="t">
-            <a:normAutofit/>
-          </a:bodyPr>
-          <a:lstStyle/>
-          <a:p>
-            <a:pPr marL="0" indent="0" algn="l">
-              <a:lnSpc>
-                <a:spcPts val="1960"/>
-              </a:lnSpc>
-              <a:buNone/>
-            </a:pPr>
-            <a:r>
-              <a:rPr lang="en-US" sz="1400" b="1">
-                <a:solidFill>
-                  <a:srgbClr val="4A5670"/>
-                </a:solidFill>
-                <a:latin typeface="Inter" pitchFamily="34" charset="0"/>
-                <a:ea typeface="Inter" pitchFamily="34" charset="-122"/>
-                <a:cs typeface="Inter" pitchFamily="34" charset="-120"/>
-              </a:rPr>
-              <a:t>Total biaya rutin tahun ke-2 dst. ± Rp8,5 jt / tahun</a:t>
-            </a:r>
-            <a:r>
-              <a:rPr lang="en-US" sz="1400">
-                <a:solidFill>
-                  <a:srgbClr val="4A5670"/>
-                </a:solidFill>
-                <a:latin typeface="Inter" pitchFamily="34" charset="0"/>
-                <a:ea typeface="Inter" pitchFamily="34" charset="-122"/>
-                <a:cs typeface="Inter" pitchFamily="34" charset="-120"/>
-              </a:rPr>
-              <a:t> (± Rp710 ribu / bulan).</a:t>
-            </a:r>
-            <a:endParaRPr lang="en-US" sz="1400" dirty="0"/>
-          </a:p>
-        </p:txBody>
-      </p:sp>
-      <p:sp>
-        <p:nvSpPr>
           <p:cNvPr id="20" name="Text 15"/>
           <p:cNvSpPr/>
           <p:nvPr/>
@@ -9156,7 +9174,7 @@
               <a:buNone/>
             </a:pPr>
             <a:r>
-              <a:rPr lang="it-IT" sz="3600" b="1" i="0">
+              <a:rPr lang="it-IT" sz="3600" b="1" i="0" dirty="0">
                 <a:solidFill>
                   <a:srgbClr val="F5F7FB"/>
                 </a:solidFill>
@@ -9438,7 +9456,7 @@
               <a:buNone/>
             </a:pPr>
             <a:r>
-              <a:rPr lang="en-US" sz="1400" b="1">
+              <a:rPr lang="en-US" sz="1400" b="1" dirty="0">
                 <a:solidFill>
                   <a:srgbClr val="16233F"/>
                 </a:solidFill>
@@ -9458,7 +9476,7 @@
               <a:buNone/>
             </a:pPr>
             <a:r>
-              <a:rPr lang="en-US" sz="1400">
+              <a:rPr lang="en-US" sz="1400" dirty="0">
                 <a:solidFill>
                   <a:srgbClr val="16233F"/>
                 </a:solidFill>
@@ -9486,7 +9504,7 @@
                 <a:ea typeface="Inter" pitchFamily="34" charset="-122"/>
                 <a:cs typeface="Inter" pitchFamily="34" charset="-120"/>
               </a:rPr>
-              <a:t>[No. HP / WhatsApp]</a:t>
+              <a:t>081281480122</a:t>
             </a:r>
             <a:endParaRPr lang="en-US" sz="1400" dirty="0"/>
           </a:p>
@@ -9506,7 +9524,7 @@
                 <a:ea typeface="Inter" pitchFamily="34" charset="-122"/>
                 <a:cs typeface="Inter" pitchFamily="34" charset="-120"/>
               </a:rPr>
-              <a:t>[Email]</a:t>
+              <a:t>erzie.aldrian02@gmail.com</a:t>
             </a:r>
             <a:endParaRPr lang="en-US" sz="1400" dirty="0"/>
           </a:p>
@@ -12331,7 +12349,7 @@
         </p:spPr>
         <p:txBody>
           <a:bodyPr wrap="square" lIns="0" tIns="0" rIns="0" bIns="0" rtlCol="0" anchor="t">
-            <a:normAutofit/>
+            <a:normAutofit fontScale="85000" lnSpcReduction="10000"/>
           </a:bodyPr>
           <a:lstStyle/>
           <a:p>
@@ -13354,7 +13372,7 @@
         </p:spPr>
         <p:txBody>
           <a:bodyPr wrap="square" lIns="0" tIns="0" rIns="0" bIns="0" rtlCol="0" anchor="t">
-            <a:normAutofit/>
+            <a:normAutofit fontScale="77500" lnSpcReduction="20000"/>
           </a:bodyPr>
           <a:lstStyle/>
           <a:p>
@@ -17026,11 +17044,10 @@
           </a:bodyPr>
           <a:lstStyle/>
           <a:p>
-            <a:pPr marL="0" indent="0" algn="l">
+            <a:pPr>
               <a:lnSpc>
                 <a:spcPts val="1960"/>
               </a:lnSpc>
-              <a:buNone/>
             </a:pPr>
             <a:r>
               <a:rPr lang="en-US" sz="1400" dirty="0">
@@ -17044,15 +17061,17 @@
               <a:t>Coba langsung: </a:t>
             </a:r>
             <a:r>
-              <a:rPr lang="en-US" sz="1400" b="1" dirty="0">
-                <a:solidFill>
-                  <a:srgbClr val="F5F7FB"/>
+              <a:rPr lang="en-US" sz="1400" dirty="0">
+                <a:solidFill>
+                  <a:schemeClr val="accent2">
+                    <a:lumMod val="75000"/>
+                  </a:schemeClr>
                 </a:solidFill>
                 <a:latin typeface="Inter" pitchFamily="34" charset="0"/>
                 <a:ea typeface="Inter" pitchFamily="34" charset="-122"/>
                 <a:cs typeface="Inter" pitchFamily="34" charset="-120"/>
               </a:rPr>
-              <a:t>[link prototype]</a:t>
+              <a:t>https://tkn-project-management.netlify.app/</a:t>
             </a:r>
             <a:r>
               <a:rPr lang="en-US" sz="1400" dirty="0">
@@ -17063,7 +17082,7 @@
                 <a:ea typeface="Inter" pitchFamily="34" charset="-122"/>
                 <a:cs typeface="Inter" pitchFamily="34" charset="-120"/>
               </a:rPr>
-              <a:t> · login demo per peran tersedia</a:t>
+              <a:t>· login demo per peran tersedia</a:t>
             </a:r>
             <a:endParaRPr lang="en-US" sz="1400" dirty="0"/>
           </a:p>
@@ -17410,7 +17429,7 @@
         </p:nvGraphicFramePr>
         <p:xfrm>
           <a:off x="5396089" y="824089"/>
-          <a:ext cx="5983111" cy="2691695"/>
+          <a:ext cx="5983111" cy="2691696"/>
         </p:xfrm>
         <a:graphic>
           <a:graphicData uri="http://schemas.openxmlformats.org/drawingml/2006/table">
